--- a/00 План-капкан до весны.pptx
+++ b/00 План-капкан до весны.pptx
@@ -1,6 +1,6 @@
 
 <file path=ppt/presentation.xml><?xml version="1.0" encoding="utf-8"?>
-<p:presentation xmlns:a="http://schemas.openxmlformats.org/drawingml/2006/main" xmlns:r="http://schemas.openxmlformats.org/officeDocument/2006/relationships" xmlns:p="http://schemas.openxmlformats.org/presentationml/2006/main" saveSubsetFonts="1">
+<p:presentation xmlns:a="http://schemas.openxmlformats.org/drawingml/2006/main" xmlns:r="http://schemas.openxmlformats.org/officeDocument/2006/relationships" xmlns:p="http://schemas.openxmlformats.org/presentationml/2006/main" embedTrueTypeFonts="1" saveSubsetFonts="1">
   <p:sldMasterIdLst>
     <p:sldMasterId id="2147483648" r:id="rId1"/>
   </p:sldMasterIdLst>
@@ -48,6 +48,15 @@
   </p:sldIdLst>
   <p:sldSz cx="12192000" cy="6858000"/>
   <p:notesSz cx="6858000" cy="9144000"/>
+  <p:embeddedFontLst>
+    <p:embeddedFont>
+      <p:font typeface="Consolas" panose="020B0609020204030204" pitchFamily="49" charset="0"/>
+      <p:regular r:id="rId42"/>
+      <p:bold r:id="rId43"/>
+      <p:italic r:id="rId44"/>
+      <p:boldItalic r:id="rId45"/>
+    </p:embeddedFont>
+  </p:embeddedFontLst>
   <p:defaultTextStyle>
     <a:defPPr>
       <a:defRPr lang="ru-RU"/>
@@ -143,6 +152,11 @@
       </a:defRPr>
     </a:lvl9pPr>
   </p:defaultTextStyle>
+  <p:extLst>
+    <p:ext uri="{EFAFB233-063F-42B5-8137-9DF3F51BA10A}">
+      <p15:sldGuideLst xmlns:p15="http://schemas.microsoft.com/office/powerpoint/2012/main"/>
+    </p:ext>
+  </p:extLst>
 </p:presentation>
 </file>
 
@@ -295,7 +309,7 @@
           <a:p>
             <a:fld id="{3D2C88B4-52BA-4239-80F8-5769EBA6FFEB}" type="datetimeFigureOut">
               <a:rPr lang="ru-RU" smtClean="0"/>
-              <a:t>29.08.2026</a:t>
+              <a:t>16.09.2026</a:t>
             </a:fld>
             <a:endParaRPr lang="ru-RU"/>
           </a:p>
@@ -495,7 +509,7 @@
           <a:p>
             <a:fld id="{3D2C88B4-52BA-4239-80F8-5769EBA6FFEB}" type="datetimeFigureOut">
               <a:rPr lang="ru-RU" smtClean="0"/>
-              <a:t>29.08.2026</a:t>
+              <a:t>16.09.2026</a:t>
             </a:fld>
             <a:endParaRPr lang="ru-RU"/>
           </a:p>
@@ -705,7 +719,7 @@
           <a:p>
             <a:fld id="{3D2C88B4-52BA-4239-80F8-5769EBA6FFEB}" type="datetimeFigureOut">
               <a:rPr lang="ru-RU" smtClean="0"/>
-              <a:t>29.08.2026</a:t>
+              <a:t>16.09.2026</a:t>
             </a:fld>
             <a:endParaRPr lang="ru-RU"/>
           </a:p>
@@ -905,7 +919,7 @@
           <a:p>
             <a:fld id="{3D2C88B4-52BA-4239-80F8-5769EBA6FFEB}" type="datetimeFigureOut">
               <a:rPr lang="ru-RU" smtClean="0"/>
-              <a:t>29.08.2026</a:t>
+              <a:t>16.09.2026</a:t>
             </a:fld>
             <a:endParaRPr lang="ru-RU"/>
           </a:p>
@@ -1181,7 +1195,7 @@
           <a:p>
             <a:fld id="{3D2C88B4-52BA-4239-80F8-5769EBA6FFEB}" type="datetimeFigureOut">
               <a:rPr lang="ru-RU" smtClean="0"/>
-              <a:t>29.08.2026</a:t>
+              <a:t>16.09.2026</a:t>
             </a:fld>
             <a:endParaRPr lang="ru-RU"/>
           </a:p>
@@ -1449,7 +1463,7 @@
           <a:p>
             <a:fld id="{3D2C88B4-52BA-4239-80F8-5769EBA6FFEB}" type="datetimeFigureOut">
               <a:rPr lang="ru-RU" smtClean="0"/>
-              <a:t>29.08.2026</a:t>
+              <a:t>16.09.2026</a:t>
             </a:fld>
             <a:endParaRPr lang="ru-RU"/>
           </a:p>
@@ -1864,7 +1878,7 @@
           <a:p>
             <a:fld id="{3D2C88B4-52BA-4239-80F8-5769EBA6FFEB}" type="datetimeFigureOut">
               <a:rPr lang="ru-RU" smtClean="0"/>
-              <a:t>29.08.2026</a:t>
+              <a:t>16.09.2026</a:t>
             </a:fld>
             <a:endParaRPr lang="ru-RU"/>
           </a:p>
@@ -2006,7 +2020,7 @@
           <a:p>
             <a:fld id="{3D2C88B4-52BA-4239-80F8-5769EBA6FFEB}" type="datetimeFigureOut">
               <a:rPr lang="ru-RU" smtClean="0"/>
-              <a:t>29.08.2026</a:t>
+              <a:t>16.09.2026</a:t>
             </a:fld>
             <a:endParaRPr lang="ru-RU"/>
           </a:p>
@@ -2119,7 +2133,7 @@
           <a:p>
             <a:fld id="{3D2C88B4-52BA-4239-80F8-5769EBA6FFEB}" type="datetimeFigureOut">
               <a:rPr lang="ru-RU" smtClean="0"/>
-              <a:t>29.08.2026</a:t>
+              <a:t>16.09.2026</a:t>
             </a:fld>
             <a:endParaRPr lang="ru-RU"/>
           </a:p>
@@ -2432,7 +2446,7 @@
           <a:p>
             <a:fld id="{3D2C88B4-52BA-4239-80F8-5769EBA6FFEB}" type="datetimeFigureOut">
               <a:rPr lang="ru-RU" smtClean="0"/>
-              <a:t>29.08.2026</a:t>
+              <a:t>16.09.2026</a:t>
             </a:fld>
             <a:endParaRPr lang="ru-RU"/>
           </a:p>
@@ -2721,7 +2735,7 @@
           <a:p>
             <a:fld id="{3D2C88B4-52BA-4239-80F8-5769EBA6FFEB}" type="datetimeFigureOut">
               <a:rPr lang="ru-RU" smtClean="0"/>
-              <a:t>29.08.2026</a:t>
+              <a:t>16.09.2026</a:t>
             </a:fld>
             <a:endParaRPr lang="ru-RU"/>
           </a:p>
@@ -2964,7 +2978,7 @@
           <a:p>
             <a:fld id="{3D2C88B4-52BA-4239-80F8-5769EBA6FFEB}" type="datetimeFigureOut">
               <a:rPr lang="ru-RU" smtClean="0"/>
-              <a:t>29.08.2026</a:t>
+              <a:t>16.09.2026</a:t>
             </a:fld>
             <a:endParaRPr lang="ru-RU"/>
           </a:p>

--- a/00 План-капкан до весны.pptx
+++ b/00 План-капкан до весны.pptx
@@ -309,7 +309,7 @@
           <a:p>
             <a:fld id="{3D2C88B4-52BA-4239-80F8-5769EBA6FFEB}" type="datetimeFigureOut">
               <a:rPr lang="ru-RU" smtClean="0"/>
-              <a:t>16.09.2026</a:t>
+              <a:t>22.09.2026</a:t>
             </a:fld>
             <a:endParaRPr lang="ru-RU"/>
           </a:p>
@@ -509,7 +509,7 @@
           <a:p>
             <a:fld id="{3D2C88B4-52BA-4239-80F8-5769EBA6FFEB}" type="datetimeFigureOut">
               <a:rPr lang="ru-RU" smtClean="0"/>
-              <a:t>16.09.2026</a:t>
+              <a:t>22.09.2026</a:t>
             </a:fld>
             <a:endParaRPr lang="ru-RU"/>
           </a:p>
@@ -719,7 +719,7 @@
           <a:p>
             <a:fld id="{3D2C88B4-52BA-4239-80F8-5769EBA6FFEB}" type="datetimeFigureOut">
               <a:rPr lang="ru-RU" smtClean="0"/>
-              <a:t>16.09.2026</a:t>
+              <a:t>22.09.2026</a:t>
             </a:fld>
             <a:endParaRPr lang="ru-RU"/>
           </a:p>
@@ -919,7 +919,7 @@
           <a:p>
             <a:fld id="{3D2C88B4-52BA-4239-80F8-5769EBA6FFEB}" type="datetimeFigureOut">
               <a:rPr lang="ru-RU" smtClean="0"/>
-              <a:t>16.09.2026</a:t>
+              <a:t>22.09.2026</a:t>
             </a:fld>
             <a:endParaRPr lang="ru-RU"/>
           </a:p>
@@ -1195,7 +1195,7 @@
           <a:p>
             <a:fld id="{3D2C88B4-52BA-4239-80F8-5769EBA6FFEB}" type="datetimeFigureOut">
               <a:rPr lang="ru-RU" smtClean="0"/>
-              <a:t>16.09.2026</a:t>
+              <a:t>22.09.2026</a:t>
             </a:fld>
             <a:endParaRPr lang="ru-RU"/>
           </a:p>
@@ -1463,7 +1463,7 @@
           <a:p>
             <a:fld id="{3D2C88B4-52BA-4239-80F8-5769EBA6FFEB}" type="datetimeFigureOut">
               <a:rPr lang="ru-RU" smtClean="0"/>
-              <a:t>16.09.2026</a:t>
+              <a:t>22.09.2026</a:t>
             </a:fld>
             <a:endParaRPr lang="ru-RU"/>
           </a:p>
@@ -1878,7 +1878,7 @@
           <a:p>
             <a:fld id="{3D2C88B4-52BA-4239-80F8-5769EBA6FFEB}" type="datetimeFigureOut">
               <a:rPr lang="ru-RU" smtClean="0"/>
-              <a:t>16.09.2026</a:t>
+              <a:t>22.09.2026</a:t>
             </a:fld>
             <a:endParaRPr lang="ru-RU"/>
           </a:p>
@@ -2020,7 +2020,7 @@
           <a:p>
             <a:fld id="{3D2C88B4-52BA-4239-80F8-5769EBA6FFEB}" type="datetimeFigureOut">
               <a:rPr lang="ru-RU" smtClean="0"/>
-              <a:t>16.09.2026</a:t>
+              <a:t>22.09.2026</a:t>
             </a:fld>
             <a:endParaRPr lang="ru-RU"/>
           </a:p>
@@ -2133,7 +2133,7 @@
           <a:p>
             <a:fld id="{3D2C88B4-52BA-4239-80F8-5769EBA6FFEB}" type="datetimeFigureOut">
               <a:rPr lang="ru-RU" smtClean="0"/>
-              <a:t>16.09.2026</a:t>
+              <a:t>22.09.2026</a:t>
             </a:fld>
             <a:endParaRPr lang="ru-RU"/>
           </a:p>
@@ -2446,7 +2446,7 @@
           <a:p>
             <a:fld id="{3D2C88B4-52BA-4239-80F8-5769EBA6FFEB}" type="datetimeFigureOut">
               <a:rPr lang="ru-RU" smtClean="0"/>
-              <a:t>16.09.2026</a:t>
+              <a:t>22.09.2026</a:t>
             </a:fld>
             <a:endParaRPr lang="ru-RU"/>
           </a:p>
@@ -2735,7 +2735,7 @@
           <a:p>
             <a:fld id="{3D2C88B4-52BA-4239-80F8-5769EBA6FFEB}" type="datetimeFigureOut">
               <a:rPr lang="ru-RU" smtClean="0"/>
-              <a:t>16.09.2026</a:t>
+              <a:t>22.09.2026</a:t>
             </a:fld>
             <a:endParaRPr lang="ru-RU"/>
           </a:p>
@@ -2978,7 +2978,7 @@
           <a:p>
             <a:fld id="{3D2C88B4-52BA-4239-80F8-5769EBA6FFEB}" type="datetimeFigureOut">
               <a:rPr lang="ru-RU" smtClean="0"/>
-              <a:t>16.09.2026</a:t>
+              <a:t>22.09.2026</a:t>
             </a:fld>
             <a:endParaRPr lang="ru-RU"/>
           </a:p>
